--- a/output/archive/QuenverellData/marketing/capabilities/2025/quenverell-capabilities-bioinformatics-2025.pptx
+++ b/output/archive/QuenverellData/marketing/capabilities/2025/quenverell-capabilities-bioinformatics-2025.pptx
@@ -795,7 +795,7 @@
           <a:lstStyle/>
           <a:p>
             <a:r>
-              <a:t>Client anonymised. Numbers on this slide are the engagement's own counts, not assay results.</a:t>
+              <a:t>Client anonymised; details on request with the client's permission.</a:t>
             </a:r>
           </a:p>
         </p:txBody>
@@ -4444,7 +4444,7 @@
               <a:rPr sz="2000">
                 <a:latin typeface="Arial"/>
               </a:rPr>
-              <a:t>Question: which of 40 candidate genes justify an assay build?</a:t>
+              <a:t>Question: which candidate genes justify building a cell assay?</a:t>
             </a:r>
           </a:p>
           <a:p>
@@ -4453,7 +4453,7 @@
               <a:rPr sz="2000">
                 <a:latin typeface="Arial"/>
               </a:rPr>
-              <a:t>Combined patient-tissue RNA-seq, genetic evidence and pathway context</a:t>
+              <a:t>Combined patient-tissue RNA-seq, genetic evidence and pathway context to prioritise candidates</a:t>
             </a:r>
           </a:p>
           <a:p>
@@ -4462,7 +4462,7 @@
               <a:rPr sz="2000">
                 <a:latin typeface="Arial"/>
               </a:rPr>
-              <a:t>Seven targets ranked high; two dropped for broad tissue expression risk</a:t>
+              <a:t>Flagged candidates with broad tissue expression as safety risks</a:t>
             </a:r>
           </a:p>
           <a:p>
@@ -4471,7 +4471,7 @@
               <a:rPr sz="2000">
                 <a:latin typeface="Arial"/>
               </a:rPr>
-              <a:t>Client built cell assays for the top three with Brindlewythe within the quarter</a:t>
+              <a:t>The client commissioned follow-up cell assays with Brindlewythe for the top-ranked targets</a:t>
             </a:r>
           </a:p>
         </p:txBody>
@@ -5362,7 +5362,7 @@
               <a:rPr sz="1500">
                 <a:latin typeface="Arial"/>
               </a:rPr>
-              <a:t>Target validation: test whether the target is expressed in the right tissue, cell type and patient subgroup</a:t>
+              <a:t>Target validation support: check expression in the relevant tissues, cell types and patient subgroups to guide functional testing</a:t>
             </a:r>
           </a:p>
           <a:p>
@@ -5380,7 +5380,7 @@
               <a:rPr sz="1500">
                 <a:latin typeface="Arial"/>
               </a:rPr>
-              <a:t>Biomarkers and stratification: find the patients most likely to respond and the markers to track it</a:t>
+              <a:t>Biomarker candidates: propose response signatures and monitoring markers for independent validation</a:t>
             </a:r>
           </a:p>
           <a:p>
